--- a/강의자료/07차시_pop_remove.pptx
+++ b/강의자료/07차시_pop_remove.pptx
@@ -6433,12 +6433,12 @@
         </p:nvSpPr>
         <p:spPr>
           <a:xfrm>
-            <a:off x="457200" y="3429000"/>
-            <a:ext cx="8229600" cy="1234440"/>
+            <a:off x="457200" y="3108960"/>
+            <a:ext cx="8229600" cy="1554480"/>
           </a:xfrm>
           <a:prstGeom prst="roundRect">
             <a:avLst>
-              <a:gd name="adj" fmla="val 5926"/>
+              <a:gd name="adj" fmla="val 4706"/>
             </a:avLst>
           </a:prstGeom>
           <a:solidFill>
@@ -6460,8 +6460,8 @@
         </p:nvSpPr>
         <p:spPr>
           <a:xfrm>
-            <a:off x="621792" y="3538728"/>
-            <a:ext cx="7900416" cy="1014984"/>
+            <a:off x="621792" y="3218688"/>
+            <a:ext cx="7900416" cy="1335024"/>
           </a:xfrm>
           <a:prstGeom prst="rect">
             <a:avLst/>
@@ -6480,7 +6480,7 @@
               <a:buNone/>
             </a:pPr>
             <a:r>
-              <a:rPr lang="en-US" sz="1200" dirty="0">
+              <a:rPr lang="en-US" sz="1549" dirty="0">
                 <a:solidFill>
                   <a:srgbClr val="E5E7EB"/>
                 </a:solidFill>
@@ -6497,7 +6497,7 @@
               <a:buNone/>
             </a:pPr>
             <a:r>
-              <a:rPr lang="en-US" sz="1200" dirty="0">
+              <a:rPr lang="en-US" sz="1549" dirty="0">
                 <a:solidFill>
                   <a:srgbClr val="FCD34D"/>
                 </a:solidFill>
@@ -6513,17 +6513,17 @@
               </a:lnSpc>
               <a:buNone/>
             </a:pPr>
-            <a:endParaRPr lang="en-US" sz="1200" dirty="0"/>
-          </a:p>
-          <a:p>
-            <a:pPr indent="0" marL="0">
-              <a:lnSpc>
-                <a:spcPct val="115000"/>
-              </a:lnSpc>
-              <a:buNone/>
-            </a:pPr>
-            <a:r>
-              <a:rPr lang="en-US" sz="1200" b="1" dirty="0">
+            <a:endParaRPr lang="en-US" sz="1549" dirty="0"/>
+          </a:p>
+          <a:p>
+            <a:pPr indent="0" marL="0">
+              <a:lnSpc>
+                <a:spcPct val="115000"/>
+              </a:lnSpc>
+              <a:buNone/>
+            </a:pPr>
+            <a:r>
+              <a:rPr lang="en-US" sz="1549" b="1" dirty="0">
                 <a:solidFill>
                   <a:srgbClr val="93C5FD"/>
                 </a:solidFill>
@@ -6540,7 +6540,7 @@
               <a:buNone/>
             </a:pPr>
             <a:r>
-              <a:rPr lang="en-US" sz="1200" dirty="0">
+              <a:rPr lang="en-US" sz="1549" dirty="0">
                 <a:solidFill>
                   <a:srgbClr val="E5E7EB"/>
                 </a:solidFill>
@@ -6557,7 +6557,7 @@
               <a:buNone/>
             </a:pPr>
             <a:r>
-              <a:rPr lang="en-US" sz="1200" b="1" dirty="0">
+              <a:rPr lang="en-US" sz="1549" b="1" dirty="0">
                 <a:solidFill>
                   <a:srgbClr val="93C5FD"/>
                 </a:solidFill>
@@ -6574,7 +6574,7 @@
               <a:buNone/>
             </a:pPr>
             <a:r>
-              <a:rPr lang="en-US" sz="1200" dirty="0">
+              <a:rPr lang="en-US" sz="1549" dirty="0">
                 <a:solidFill>
                   <a:srgbClr val="E5E7EB"/>
                 </a:solidFill>
@@ -6590,17 +6590,17 @@
               </a:lnSpc>
               <a:buNone/>
             </a:pPr>
-            <a:endParaRPr lang="en-US" sz="1200" dirty="0"/>
-          </a:p>
-          <a:p>
-            <a:pPr indent="0" marL="0">
-              <a:lnSpc>
-                <a:spcPct val="115000"/>
-              </a:lnSpc>
-              <a:buNone/>
-            </a:pPr>
-            <a:r>
-              <a:rPr lang="en-US" sz="1200" dirty="0">
+            <a:endParaRPr lang="en-US" sz="1549" dirty="0"/>
+          </a:p>
+          <a:p>
+            <a:pPr indent="0" marL="0">
+              <a:lnSpc>
+                <a:spcPct val="115000"/>
+              </a:lnSpc>
+              <a:buNone/>
+            </a:pPr>
+            <a:r>
+              <a:rPr lang="en-US" sz="1549" dirty="0">
                 <a:solidFill>
                   <a:srgbClr val="E5E7EB"/>
                 </a:solidFill>
@@ -6616,17 +6616,17 @@
               </a:lnSpc>
               <a:buNone/>
             </a:pPr>
-            <a:endParaRPr lang="en-US" sz="1200" dirty="0"/>
-          </a:p>
-          <a:p>
-            <a:pPr indent="0" marL="0">
-              <a:lnSpc>
-                <a:spcPct val="115000"/>
-              </a:lnSpc>
-              <a:buNone/>
-            </a:pPr>
-            <a:r>
-              <a:rPr lang="en-US" sz="1200" b="1" dirty="0">
+            <a:endParaRPr lang="en-US" sz="1549" dirty="0"/>
+          </a:p>
+          <a:p>
+            <a:pPr indent="0" marL="0">
+              <a:lnSpc>
+                <a:spcPct val="115000"/>
+              </a:lnSpc>
+              <a:buNone/>
+            </a:pPr>
+            <a:r>
+              <a:rPr lang="en-US" sz="1549" b="1" dirty="0">
                 <a:solidFill>
                   <a:srgbClr val="93C5FD"/>
                 </a:solidFill>
@@ -6643,7 +6643,7 @@
               <a:buNone/>
             </a:pPr>
             <a:r>
-              <a:rPr lang="en-US" sz="1200" dirty="0">
+              <a:rPr lang="en-US" sz="1549" dirty="0">
                 <a:solidFill>
                   <a:srgbClr val="E5E7EB"/>
                 </a:solidFill>
@@ -6659,17 +6659,17 @@
               </a:lnSpc>
               <a:buNone/>
             </a:pPr>
-            <a:endParaRPr lang="en-US" sz="1200" dirty="0"/>
-          </a:p>
-          <a:p>
-            <a:pPr indent="0" marL="0">
-              <a:lnSpc>
-                <a:spcPct val="115000"/>
-              </a:lnSpc>
-              <a:buNone/>
-            </a:pPr>
-            <a:r>
-              <a:rPr lang="en-US" sz="1200" dirty="0">
+            <a:endParaRPr lang="en-US" sz="1549" dirty="0"/>
+          </a:p>
+          <a:p>
+            <a:pPr indent="0" marL="0">
+              <a:lnSpc>
+                <a:spcPct val="115000"/>
+              </a:lnSpc>
+              <a:buNone/>
+            </a:pPr>
+            <a:r>
+              <a:rPr lang="en-US" sz="1549" dirty="0">
                 <a:solidFill>
                   <a:srgbClr val="E5E7EB"/>
                 </a:solidFill>
@@ -6686,7 +6686,7 @@
               <a:buNone/>
             </a:pPr>
             <a:r>
-              <a:rPr lang="en-US" sz="1200" b="1" dirty="0">
+              <a:rPr lang="en-US" sz="1549" b="1" dirty="0">
                 <a:solidFill>
                   <a:srgbClr val="93C5FD"/>
                 </a:solidFill>
@@ -6703,7 +6703,7 @@
               <a:buNone/>
             </a:pPr>
             <a:r>
-              <a:rPr lang="en-US" sz="1200" dirty="0">
+              <a:rPr lang="en-US" sz="1549" dirty="0">
                 <a:solidFill>
                   <a:srgbClr val="E5E7EB"/>
                 </a:solidFill>
@@ -6720,7 +6720,7 @@
               <a:buNone/>
             </a:pPr>
             <a:r>
-              <a:rPr lang="en-US" sz="1200" dirty="0">
+              <a:rPr lang="en-US" sz="1549" dirty="0">
                 <a:solidFill>
                   <a:srgbClr val="FCD34D"/>
                 </a:solidFill>
@@ -6737,7 +6737,7 @@
               <a:buNone/>
             </a:pPr>
             <a:r>
-              <a:rPr lang="en-US" sz="1200" dirty="0">
+              <a:rPr lang="en-US" sz="1549" dirty="0">
                 <a:solidFill>
                   <a:srgbClr val="E5E7EB"/>
                 </a:solidFill>
@@ -6747,7 +6747,7 @@
               </a:rPr>
               <a:t>)</a:t>
             </a:r>
-            <a:endParaRPr lang="en-US" sz="1200" dirty="0"/>
+            <a:endParaRPr lang="en-US" sz="1549" dirty="0"/>
           </a:p>
         </p:txBody>
       </p:sp>

--- a/강의자료/07차시_pop_remove.pptx
+++ b/강의자료/07차시_pop_remove.pptx
@@ -6102,7 +6102,7 @@
         <p:spPr>
           <a:xfrm>
             <a:off x="457200" y="1965960"/>
-            <a:ext cx="2590800" cy="1097280"/>
+            <a:ext cx="2590800" cy="1417320"/>
           </a:xfrm>
           <a:prstGeom prst="rect">
             <a:avLst/>
@@ -6247,7 +6247,7 @@
         <p:spPr>
           <a:xfrm>
             <a:off x="3276600" y="1965960"/>
-            <a:ext cx="2590800" cy="1097280"/>
+            <a:ext cx="2590800" cy="1417320"/>
           </a:xfrm>
           <a:prstGeom prst="rect">
             <a:avLst/>
@@ -6392,7 +6392,7 @@
         <p:spPr>
           <a:xfrm>
             <a:off x="6096000" y="1965960"/>
-            <a:ext cx="2590800" cy="1097280"/>
+            <a:ext cx="2590800" cy="1417320"/>
           </a:xfrm>
           <a:prstGeom prst="rect">
             <a:avLst/>
@@ -7793,7 +7793,7 @@
                 <a:ea typeface="Malgun Gothic" pitchFamily="34" charset="-122"/>
                 <a:cs typeface="Malgun Gothic" pitchFamily="34" charset="-120"/>
               </a:rPr>
-              <a:t>STEP 1 조립</a:t>
+              <a:t>STEP 1 코드 소환</a:t>
             </a:r>
             <a:endParaRPr lang="en-US" sz="1400" dirty="0"/>
           </a:p>
@@ -7808,7 +7808,7 @@
         <p:spPr>
           <a:xfrm>
             <a:off x="457200" y="1874520"/>
-            <a:ext cx="2590800" cy="1097280"/>
+            <a:ext cx="2590800" cy="1417320"/>
           </a:xfrm>
           <a:prstGeom prst="rect">
             <a:avLst/>
@@ -7835,7 +7835,7 @@
                 <a:ea typeface="Malgun Gothic" pitchFamily="34" charset="-122"/>
                 <a:cs typeface="Malgun Gothic" pitchFamily="34" charset="-120"/>
               </a:rPr>
-              <a:t>pop 인덱스(맨 앞·맨 뒤·세 번째)와 remove 대상(어뷰저·유저B)을 골라 조립.</a:t>
+              <a:t>「pop &amp; remove 삭제 파이프라인 조립」 버튼 → 큐 5명에서 pop 한 명, remove 한 명 하는 코드가 나타난다.</a:t>
             </a:r>
             <a:endParaRPr lang="en-US" sz="1200" dirty="0"/>
           </a:p>
@@ -7938,7 +7938,7 @@
                 <a:ea typeface="Malgun Gothic" pitchFamily="34" charset="-122"/>
                 <a:cs typeface="Malgun Gothic" pitchFamily="34" charset="-120"/>
               </a:rPr>
-              <a:t>STEP 2 예측</a:t>
+              <a:t>STEP 2 파라미터 적용</a:t>
             </a:r>
             <a:endParaRPr lang="en-US" sz="1400" dirty="0"/>
           </a:p>
@@ -7953,7 +7953,7 @@
         <p:spPr>
           <a:xfrm>
             <a:off x="3276600" y="1874520"/>
-            <a:ext cx="2590800" cy="1097280"/>
+            <a:ext cx="2590800" cy="1417320"/>
           </a:xfrm>
           <a:prstGeom prst="rect">
             <a:avLst/>
@@ -7980,7 +7980,7 @@
                 <a:ea typeface="Malgun Gothic" pitchFamily="34" charset="-122"/>
                 <a:cs typeface="Malgun Gothic" pitchFamily="34" charset="-120"/>
               </a:rPr>
-              <a:t>실행 전에 남는 큐를 종이에 적어 보기.</a:t>
+              <a:t>pop 인덱스(맨 앞·맨 뒤·세 번째)와 remove 대상(어뷰저·유저B)을 고르고 「파라미터 적용」. 남을 큐를 먼저 종이에 적는다.</a:t>
             </a:r>
             <a:endParaRPr lang="en-US" sz="1200" dirty="0"/>
           </a:p>
@@ -8083,7 +8083,7 @@
                 <a:ea typeface="Malgun Gothic" pitchFamily="34" charset="-122"/>
                 <a:cs typeface="Malgun Gothic" pitchFamily="34" charset="-120"/>
               </a:rPr>
-              <a:t>STEP 3 확인</a:t>
+              <a:t>STEP 3 실행 · 차트</a:t>
             </a:r>
             <a:endParaRPr lang="en-US" sz="1400" dirty="0"/>
           </a:p>
@@ -8098,7 +8098,7 @@
         <p:spPr>
           <a:xfrm>
             <a:off x="6096000" y="1874520"/>
-            <a:ext cx="2590800" cy="1097280"/>
+            <a:ext cx="2590800" cy="1417320"/>
           </a:xfrm>
           <a:prstGeom prst="rect">
             <a:avLst/>
@@ -8125,7 +8125,7 @@
                 <a:ea typeface="Malgun Gothic" pitchFamily="34" charset="-122"/>
                 <a:cs typeface="Malgun Gothic" pitchFamily="34" charset="-120"/>
               </a:rPr>
-              <a:t>차트에서 주황 = pop 으로 꺼냄, 빨강 = remove 로 삭제.</a:t>
+              <a:t>「파이프라인 실행」 → 다섯 막대 중 주황 = pop 으로 꺼낸 사람, 빨강 = remove 로 지운 사람. 종이와 맞는지 확인.</a:t>
             </a:r>
             <a:endParaRPr lang="en-US" sz="1200" dirty="0"/>
           </a:p>
